--- a/assets/pptx/catalog-335.pptx
+++ b/assets/pptx/catalog-335.pptx
@@ -3353,7 +3353,7 @@
                 <a:ea typeface="Ebrima"/>
                 <a:cs typeface="Ebrima"/>
               </a:rPr>
-              <a:t>(2x)</a:t>
+              <a:t>2x</a:t>
             </a:r>
           </a:p>
         </p:txBody>
@@ -3420,7 +3420,7 @@
                 <a:ea typeface="Ebrima"/>
                 <a:cs typeface="Ebrima"/>
               </a:rPr>
-              <a:t>ሃሌሉያ ክብር ይገባሀልና አምሣያ የሌለህ ሁሉን ቻይ ነህና (2x)</a:t>
+              <a:t>ሃሌሉያ ክብር ይገባሀልና አምሣያ የሌለህ ሁሉን ቻይ ነህና 2x</a:t>
             </a:r>
           </a:p>
         </p:txBody>
@@ -3595,7 +3595,7 @@
                 <a:ea typeface="Ebrima"/>
                 <a:cs typeface="Ebrima"/>
               </a:rPr>
-              <a:t>(2x)</a:t>
+              <a:t>2x</a:t>
             </a:r>
           </a:p>
         </p:txBody>
@@ -3662,7 +3662,7 @@
                 <a:ea typeface="Ebrima"/>
                 <a:cs typeface="Ebrima"/>
               </a:rPr>
-              <a:t>ሃሌሉያ ክብር ይገባሀልና አምሣያ የሌለህ ሁሉን ቻይ ነህና (2x)</a:t>
+              <a:t>ሃሌሉያ ክብር ይገባሀልና አምሣያ የሌለህ ሁሉን ቻይ ነህና 2x</a:t>
             </a:r>
           </a:p>
         </p:txBody>
@@ -3855,7 +3855,7 @@
                 <a:ea typeface="Ebrima"/>
                 <a:cs typeface="Ebrima"/>
               </a:rPr>
-              <a:t>ሃሌሉያ ክብር ይገባሀልና አምሣያ የሌለህ ሁሉን ቻይ ነህና (2x)</a:t>
+              <a:t>ሃሌሉያ ክብር ይገባሀልና አምሣያ የሌለህ ሁሉን ቻይ ነህና 2x</a:t>
             </a:r>
           </a:p>
         </p:txBody>
